--- a/lecture/lecture 03 python overview.pptx
+++ b/lecture/lecture 03 python overview.pptx
@@ -242,7 +242,7 @@
                   <a:schemeClr val="tx2"/>
                 </a:solidFill>
               </a:rPr>
-              <a:t>8/30/2023</a:t>
+              <a:t>8/26/2024</a:t>
             </a:fld>
             <a:endParaRPr>
               <a:solidFill>
@@ -432,7 +432,7 @@
             <a:fld id="{F95CF31C-F757-429C-A789-86504F04C3BE}" type="datetimeFigureOut">
               <a:rPr lang="en-US"/>
               <a:pPr/>
-              <a:t>8/30/2023</a:t>
+              <a:t>8/26/2024</a:t>
             </a:fld>
             <a:endParaRPr/>
           </a:p>
@@ -1027,7 +1027,7 @@
           <a:p>
             <a:fld id="{7AECB6C2-1084-4AED-A74A-DF028B0094EA}" type="datetimeFigureOut">
               <a:rPr lang="en-US"/>
-              <a:t>8/30/2023</a:t>
+              <a:t>8/26/2024</a:t>
             </a:fld>
             <a:endParaRPr/>
           </a:p>
@@ -1219,7 +1219,7 @@
           <a:p>
             <a:fld id="{7AECB6C2-1084-4AED-A74A-DF028B0094EA}" type="datetimeFigureOut">
               <a:rPr lang="en-US"/>
-              <a:t>8/30/2023</a:t>
+              <a:t>8/26/2024</a:t>
             </a:fld>
             <a:endParaRPr/>
           </a:p>
@@ -1417,7 +1417,7 @@
           <a:p>
             <a:fld id="{8B5A30F4-0B4E-4E4B-BC36-C30CD13F4E17}" type="datetimeFigureOut">
               <a:rPr lang="en-US"/>
-              <a:t>8/30/2023</a:t>
+              <a:t>8/26/2024</a:t>
             </a:fld>
             <a:endParaRPr dirty="0"/>
           </a:p>
@@ -1934,7 +1934,7 @@
           <a:p>
             <a:fld id="{2DD204D1-F9BD-4643-8480-6EA41EB484F1}" type="datetimeFigureOut">
               <a:rPr lang="en-US"/>
-              <a:t>8/30/2023</a:t>
+              <a:t>8/26/2024</a:t>
             </a:fld>
             <a:endParaRPr/>
           </a:p>
@@ -2382,7 +2382,7 @@
           <a:p>
             <a:fld id="{2DD204D1-F9BD-4643-8480-6EA41EB484F1}" type="datetimeFigureOut">
               <a:rPr lang="en-US"/>
-              <a:t>8/30/2023</a:t>
+              <a:t>8/26/2024</a:t>
             </a:fld>
             <a:endParaRPr/>
           </a:p>
@@ -2512,7 +2512,7 @@
           <a:p>
             <a:fld id="{2DD204D1-F9BD-4643-8480-6EA41EB484F1}" type="datetimeFigureOut">
               <a:rPr lang="en-US"/>
-              <a:t>8/30/2023</a:t>
+              <a:t>8/26/2024</a:t>
             </a:fld>
             <a:endParaRPr/>
           </a:p>
@@ -2619,7 +2619,7 @@
           <a:p>
             <a:fld id="{2DD204D1-F9BD-4643-8480-6EA41EB484F1}" type="datetimeFigureOut">
               <a:rPr lang="en-US"/>
-              <a:t>8/30/2023</a:t>
+              <a:t>8/26/2024</a:t>
             </a:fld>
             <a:endParaRPr/>
           </a:p>
@@ -2976,7 +2976,7 @@
           <a:p>
             <a:fld id="{126BF754-515F-40B9-8D24-D54D5825B3D0}" type="datetimeFigureOut">
               <a:rPr lang="en-US"/>
-              <a:t>8/30/2023</a:t>
+              <a:t>8/26/2024</a:t>
             </a:fld>
             <a:endParaRPr/>
           </a:p>
@@ -3313,7 +3313,7 @@
           <a:p>
             <a:fld id="{126BF754-515F-40B9-8D24-D54D5825B3D0}" type="datetimeFigureOut">
               <a:rPr lang="en-US"/>
-              <a:t>8/30/2023</a:t>
+              <a:t>8/26/2024</a:t>
             </a:fld>
             <a:endParaRPr/>
           </a:p>
@@ -3608,7 +3608,7 @@
             <a:fld id="{2DD204D1-F9BD-4643-8480-6EA41EB484F1}" type="datetimeFigureOut">
               <a:rPr lang="en-US" smtClean="0"/>
               <a:pPr/>
-              <a:t>8/30/2023</a:t>
+              <a:t>8/26/2024</a:t>
             </a:fld>
             <a:endParaRPr lang="en-US"/>
           </a:p>
@@ -5932,13 +5932,6 @@
             <a:r>
               <a:rPr lang="en-US" dirty="0"/>
               <a:t>Python 3 (2008 – now)</a:t>
-            </a:r>
-          </a:p>
-          <a:p>
-            <a:pPr lvl="1"/>
-            <a:r>
-              <a:rPr lang="en-US" dirty="0"/>
-              <a:t>The latest version 3.8.5</a:t>
             </a:r>
           </a:p>
           <a:p>
